--- a/VLSI design 설계 실습/2025-05-28.pptx
+++ b/VLSI design 설계 실습/2025-05-28.pptx
@@ -20,13 +20,10 @@
     <p:sldId id="268" r:id="rId14"/>
     <p:sldId id="269" r:id="rId15"/>
     <p:sldId id="270" r:id="rId16"/>
-    <p:sldId id="271" r:id="rId17"/>
-    <p:sldId id="273" r:id="rId18"/>
-    <p:sldId id="275" r:id="rId19"/>
-    <p:sldId id="274" r:id="rId20"/>
-    <p:sldId id="276" r:id="rId21"/>
-    <p:sldId id="277" r:id="rId22"/>
-    <p:sldId id="278" r:id="rId23"/>
+    <p:sldId id="280" r:id="rId17"/>
+    <p:sldId id="271" r:id="rId18"/>
+    <p:sldId id="273" r:id="rId19"/>
+    <p:sldId id="275" r:id="rId20"/>
   </p:sldIdLst>
   <p:sldSz cx="12192000" cy="6858000"/>
   <p:notesSz cx="6858000" cy="9144000"/>
@@ -262,7 +259,7 @@
           <a:p>
             <a:fld id="{14979939-5C65-4792-9B4E-BE39A3E42977}" type="datetimeFigureOut">
               <a:rPr lang="ko-KR" altLang="en-US" smtClean="0"/>
-              <a:t>2025-06-15</a:t>
+              <a:t>2025-06-16</a:t>
             </a:fld>
             <a:endParaRPr lang="ko-KR" altLang="en-US"/>
           </a:p>
@@ -430,7 +427,7 @@
           <a:p>
             <a:fld id="{14979939-5C65-4792-9B4E-BE39A3E42977}" type="datetimeFigureOut">
               <a:rPr lang="ko-KR" altLang="en-US" smtClean="0"/>
-              <a:t>2025-06-15</a:t>
+              <a:t>2025-06-16</a:t>
             </a:fld>
             <a:endParaRPr lang="ko-KR" altLang="en-US"/>
           </a:p>
@@ -608,7 +605,7 @@
           <a:p>
             <a:fld id="{14979939-5C65-4792-9B4E-BE39A3E42977}" type="datetimeFigureOut">
               <a:rPr lang="ko-KR" altLang="en-US" smtClean="0"/>
-              <a:t>2025-06-15</a:t>
+              <a:t>2025-06-16</a:t>
             </a:fld>
             <a:endParaRPr lang="ko-KR" altLang="en-US"/>
           </a:p>
@@ -776,7 +773,7 @@
           <a:p>
             <a:fld id="{14979939-5C65-4792-9B4E-BE39A3E42977}" type="datetimeFigureOut">
               <a:rPr lang="ko-KR" altLang="en-US" smtClean="0"/>
-              <a:t>2025-06-15</a:t>
+              <a:t>2025-06-16</a:t>
             </a:fld>
             <a:endParaRPr lang="ko-KR" altLang="en-US"/>
           </a:p>
@@ -1021,7 +1018,7 @@
           <a:p>
             <a:fld id="{14979939-5C65-4792-9B4E-BE39A3E42977}" type="datetimeFigureOut">
               <a:rPr lang="ko-KR" altLang="en-US" smtClean="0"/>
-              <a:t>2025-06-15</a:t>
+              <a:t>2025-06-16</a:t>
             </a:fld>
             <a:endParaRPr lang="ko-KR" altLang="en-US"/>
           </a:p>
@@ -1250,7 +1247,7 @@
           <a:p>
             <a:fld id="{14979939-5C65-4792-9B4E-BE39A3E42977}" type="datetimeFigureOut">
               <a:rPr lang="ko-KR" altLang="en-US" smtClean="0"/>
-              <a:t>2025-06-15</a:t>
+              <a:t>2025-06-16</a:t>
             </a:fld>
             <a:endParaRPr lang="ko-KR" altLang="en-US"/>
           </a:p>
@@ -1614,7 +1611,7 @@
           <a:p>
             <a:fld id="{14979939-5C65-4792-9B4E-BE39A3E42977}" type="datetimeFigureOut">
               <a:rPr lang="ko-KR" altLang="en-US" smtClean="0"/>
-              <a:t>2025-06-15</a:t>
+              <a:t>2025-06-16</a:t>
             </a:fld>
             <a:endParaRPr lang="ko-KR" altLang="en-US"/>
           </a:p>
@@ -1731,7 +1728,7 @@
           <a:p>
             <a:fld id="{14979939-5C65-4792-9B4E-BE39A3E42977}" type="datetimeFigureOut">
               <a:rPr lang="ko-KR" altLang="en-US" smtClean="0"/>
-              <a:t>2025-06-15</a:t>
+              <a:t>2025-06-16</a:t>
             </a:fld>
             <a:endParaRPr lang="ko-KR" altLang="en-US"/>
           </a:p>
@@ -1826,7 +1823,7 @@
           <a:p>
             <a:fld id="{14979939-5C65-4792-9B4E-BE39A3E42977}" type="datetimeFigureOut">
               <a:rPr lang="ko-KR" altLang="en-US" smtClean="0"/>
-              <a:t>2025-06-15</a:t>
+              <a:t>2025-06-16</a:t>
             </a:fld>
             <a:endParaRPr lang="ko-KR" altLang="en-US"/>
           </a:p>
@@ -2101,7 +2098,7 @@
           <a:p>
             <a:fld id="{14979939-5C65-4792-9B4E-BE39A3E42977}" type="datetimeFigureOut">
               <a:rPr lang="ko-KR" altLang="en-US" smtClean="0"/>
-              <a:t>2025-06-15</a:t>
+              <a:t>2025-06-16</a:t>
             </a:fld>
             <a:endParaRPr lang="ko-KR" altLang="en-US"/>
           </a:p>
@@ -2353,7 +2350,7 @@
           <a:p>
             <a:fld id="{14979939-5C65-4792-9B4E-BE39A3E42977}" type="datetimeFigureOut">
               <a:rPr lang="ko-KR" altLang="en-US" smtClean="0"/>
-              <a:t>2025-06-15</a:t>
+              <a:t>2025-06-16</a:t>
             </a:fld>
             <a:endParaRPr lang="ko-KR" altLang="en-US"/>
           </a:p>
@@ -2570,7 +2567,7 @@
           <a:p>
             <a:fld id="{14979939-5C65-4792-9B4E-BE39A3E42977}" type="datetimeFigureOut">
               <a:rPr lang="ko-KR" altLang="en-US" smtClean="0"/>
-              <a:t>2025-06-15</a:t>
+              <a:t>2025-06-16</a:t>
             </a:fld>
             <a:endParaRPr lang="ko-KR" altLang="en-US"/>
           </a:p>
@@ -3638,6 +3635,83 @@
           <a:lstStyle/>
           <a:p>
             <a:r>
+              <a:rPr lang="ko-KR" altLang="en-US" dirty="0" smtClean="0"/>
+              <a:t>동기 방식과 비동기 방식의 차이점</a:t>
+            </a:r>
+            <a:endParaRPr lang="ko-KR" altLang="en-US" dirty="0"/>
+          </a:p>
+        </p:txBody>
+      </p:sp>
+      <p:pic>
+        <p:nvPicPr>
+          <p:cNvPr id="4" name="그림 3"/>
+          <p:cNvPicPr>
+            <a:picLocks noChangeAspect="1"/>
+          </p:cNvPicPr>
+          <p:nvPr/>
+        </p:nvPicPr>
+        <p:blipFill>
+          <a:blip r:embed="rId2"/>
+          <a:stretch>
+            <a:fillRect/>
+          </a:stretch>
+        </p:blipFill>
+        <p:spPr>
+          <a:xfrm>
+            <a:off x="838200" y="1690688"/>
+            <a:ext cx="9748016" cy="4400146"/>
+          </a:xfrm>
+          <a:prstGeom prst="rect">
+            <a:avLst/>
+          </a:prstGeom>
+        </p:spPr>
+      </p:pic>
+    </p:spTree>
+    <p:extLst>
+      <p:ext uri="{BB962C8B-B14F-4D97-AF65-F5344CB8AC3E}">
+        <p14:creationId xmlns:p14="http://schemas.microsoft.com/office/powerpoint/2010/main" val="3490688517"/>
+      </p:ext>
+    </p:extLst>
+  </p:cSld>
+  <p:clrMapOvr>
+    <a:masterClrMapping/>
+  </p:clrMapOvr>
+</p:sld>
+</file>
+
+<file path=ppt/slides/slide17.xml><?xml version="1.0" encoding="utf-8"?>
+<p:sld xmlns:a="http://schemas.openxmlformats.org/drawingml/2006/main" xmlns:r="http://schemas.openxmlformats.org/officeDocument/2006/relationships" xmlns:p="http://schemas.openxmlformats.org/presentationml/2006/main">
+  <p:cSld>
+    <p:spTree>
+      <p:nvGrpSpPr>
+        <p:cNvPr id="1" name=""/>
+        <p:cNvGrpSpPr/>
+        <p:nvPr/>
+      </p:nvGrpSpPr>
+      <p:grpSpPr>
+        <a:xfrm>
+          <a:off x="0" y="0"/>
+          <a:ext cx="0" cy="0"/>
+          <a:chOff x="0" y="0"/>
+          <a:chExt cx="0" cy="0"/>
+        </a:xfrm>
+      </p:grpSpPr>
+      <p:sp>
+        <p:nvSpPr>
+          <p:cNvPr id="2" name="제목 1"/>
+          <p:cNvSpPr>
+            <a:spLocks noGrp="1"/>
+          </p:cNvSpPr>
+          <p:nvPr>
+            <p:ph type="title"/>
+          </p:nvPr>
+        </p:nvSpPr>
+        <p:spPr/>
+        <p:txBody>
+          <a:bodyPr/>
+          <a:lstStyle/>
+          <a:p>
+            <a:r>
               <a:rPr lang="ko-KR" altLang="en-US" dirty="0"/>
               <a:t>카운터 그래프</a:t>
             </a:r>
@@ -3683,7 +3757,7 @@
 </p:sld>
 </file>
 
-<file path=ppt/slides/slide17.xml><?xml version="1.0" encoding="utf-8"?>
+<file path=ppt/slides/slide18.xml><?xml version="1.0" encoding="utf-8"?>
 <p:sld xmlns:a="http://schemas.openxmlformats.org/drawingml/2006/main" xmlns:r="http://schemas.openxmlformats.org/officeDocument/2006/relationships" xmlns:p="http://schemas.openxmlformats.org/presentationml/2006/main">
   <p:cSld>
     <p:spTree>
@@ -3758,7 +3832,7 @@
 </p:sld>
 </file>
 
-<file path=ppt/slides/slide18.xml><?xml version="1.0" encoding="utf-8"?>
+<file path=ppt/slides/slide19.xml><?xml version="1.0" encoding="utf-8"?>
 <p:sld xmlns:a="http://schemas.openxmlformats.org/drawingml/2006/main" xmlns:r="http://schemas.openxmlformats.org/officeDocument/2006/relationships" xmlns:p="http://schemas.openxmlformats.org/presentationml/2006/main">
   <p:cSld>
     <p:spTree>
@@ -3830,88 +3904,13 @@
   <p:clrMapOvr>
     <a:masterClrMapping/>
   </p:clrMapOvr>
-</p:sld>
-</file>
-
-<file path=ppt/slides/slide19.xml><?xml version="1.0" encoding="utf-8"?>
-<p:sld xmlns:a="http://schemas.openxmlformats.org/drawingml/2006/main" xmlns:r="http://schemas.openxmlformats.org/officeDocument/2006/relationships" xmlns:p="http://schemas.openxmlformats.org/presentationml/2006/main">
-  <p:cSld>
-    <p:spTree>
-      <p:nvGrpSpPr>
-        <p:cNvPr id="1" name=""/>
-        <p:cNvGrpSpPr/>
-        <p:nvPr/>
-      </p:nvGrpSpPr>
-      <p:grpSpPr>
-        <a:xfrm>
-          <a:off x="0" y="0"/>
-          <a:ext cx="0" cy="0"/>
-          <a:chOff x="0" y="0"/>
-          <a:chExt cx="0" cy="0"/>
-        </a:xfrm>
-      </p:grpSpPr>
-      <p:sp>
-        <p:nvSpPr>
-          <p:cNvPr id="2" name="제목 1"/>
-          <p:cNvSpPr>
-            <a:spLocks noGrp="1"/>
-          </p:cNvSpPr>
-          <p:nvPr>
-            <p:ph type="title"/>
-          </p:nvPr>
-        </p:nvSpPr>
-        <p:spPr/>
-        <p:txBody>
-          <a:bodyPr/>
-          <a:lstStyle/>
-          <a:p>
-            <a:r>
-              <a:rPr lang="en-US" altLang="ko-KR" dirty="0"/>
-              <a:t>CMOS NOR </a:t>
-            </a:r>
-            <a:r>
-              <a:rPr lang="ko-KR" altLang="en-US" dirty="0"/>
-              <a:t>게이트의 회로도</a:t>
-            </a:r>
-          </a:p>
-        </p:txBody>
-      </p:sp>
-      <p:pic>
-        <p:nvPicPr>
-          <p:cNvPr id="4" name="내용 개체 틀 3"/>
-          <p:cNvPicPr>
-            <a:picLocks noGrp="1" noChangeAspect="1"/>
-          </p:cNvPicPr>
-          <p:nvPr>
-            <p:ph idx="1"/>
-          </p:nvPr>
-        </p:nvPicPr>
-        <p:blipFill>
-          <a:blip r:embed="rId2"/>
-          <a:stretch>
-            <a:fillRect/>
-          </a:stretch>
-        </p:blipFill>
-        <p:spPr>
-          <a:xfrm>
-            <a:off x="838200" y="1706729"/>
-            <a:ext cx="10515600" cy="4281487"/>
-          </a:xfrm>
-          <a:prstGeom prst="rect">
-            <a:avLst/>
-          </a:prstGeom>
-        </p:spPr>
-      </p:pic>
-    </p:spTree>
-    <p:extLst>
-      <p:ext uri="{BB962C8B-B14F-4D97-AF65-F5344CB8AC3E}">
-        <p14:creationId xmlns:p14="http://schemas.microsoft.com/office/powerpoint/2010/main" val="3147261836"/>
-      </p:ext>
-    </p:extLst>
-  </p:cSld>
-  <p:clrMapOvr>
-    <a:masterClrMapping/>
-  </p:clrMapOvr>
+  <p:timing>
+    <p:tnLst>
+      <p:par>
+        <p:cTn id="1" dur="indefinite" restart="never" nodeType="tmRoot"/>
+      </p:par>
+    </p:tnLst>
+  </p:timing>
 </p:sld>
 </file>
 
@@ -3988,320 +3987,6 @@
     <p:extLst>
       <p:ext uri="{BB962C8B-B14F-4D97-AF65-F5344CB8AC3E}">
         <p14:creationId xmlns:p14="http://schemas.microsoft.com/office/powerpoint/2010/main" val="1950472084"/>
-      </p:ext>
-    </p:extLst>
-  </p:cSld>
-  <p:clrMapOvr>
-    <a:masterClrMapping/>
-  </p:clrMapOvr>
-</p:sld>
-</file>
-
-<file path=ppt/slides/slide20.xml><?xml version="1.0" encoding="utf-8"?>
-<p:sld xmlns:a="http://schemas.openxmlformats.org/drawingml/2006/main" xmlns:r="http://schemas.openxmlformats.org/officeDocument/2006/relationships" xmlns:p="http://schemas.openxmlformats.org/presentationml/2006/main">
-  <p:cSld>
-    <p:spTree>
-      <p:nvGrpSpPr>
-        <p:cNvPr id="1" name=""/>
-        <p:cNvGrpSpPr/>
-        <p:nvPr/>
-      </p:nvGrpSpPr>
-      <p:grpSpPr>
-        <a:xfrm>
-          <a:off x="0" y="0"/>
-          <a:ext cx="0" cy="0"/>
-          <a:chOff x="0" y="0"/>
-          <a:chExt cx="0" cy="0"/>
-        </a:xfrm>
-      </p:grpSpPr>
-      <p:sp>
-        <p:nvSpPr>
-          <p:cNvPr id="2" name="제목 1"/>
-          <p:cNvSpPr>
-            <a:spLocks noGrp="1"/>
-          </p:cNvSpPr>
-          <p:nvPr>
-            <p:ph type="title"/>
-          </p:nvPr>
-        </p:nvSpPr>
-        <p:spPr/>
-        <p:txBody>
-          <a:bodyPr/>
-          <a:lstStyle/>
-          <a:p>
-            <a:endParaRPr lang="ko-KR" altLang="en-US" dirty="0"/>
-          </a:p>
-        </p:txBody>
-      </p:sp>
-      <p:pic>
-        <p:nvPicPr>
-          <p:cNvPr id="4" name="내용 개체 틀 3"/>
-          <p:cNvPicPr>
-            <a:picLocks noGrp="1" noChangeAspect="1"/>
-          </p:cNvPicPr>
-          <p:nvPr>
-            <p:ph idx="1"/>
-          </p:nvPr>
-        </p:nvPicPr>
-        <p:blipFill>
-          <a:blip r:embed="rId2"/>
-          <a:stretch>
-            <a:fillRect/>
-          </a:stretch>
-        </p:blipFill>
-        <p:spPr>
-          <a:xfrm>
-            <a:off x="838200" y="1863725"/>
-            <a:ext cx="10515600" cy="4351338"/>
-          </a:xfrm>
-          <a:prstGeom prst="rect">
-            <a:avLst/>
-          </a:prstGeom>
-        </p:spPr>
-      </p:pic>
-    </p:spTree>
-    <p:extLst>
-      <p:ext uri="{BB962C8B-B14F-4D97-AF65-F5344CB8AC3E}">
-        <p14:creationId xmlns:p14="http://schemas.microsoft.com/office/powerpoint/2010/main" val="3934971207"/>
-      </p:ext>
-    </p:extLst>
-  </p:cSld>
-  <p:clrMapOvr>
-    <a:masterClrMapping/>
-  </p:clrMapOvr>
-</p:sld>
-</file>
-
-<file path=ppt/slides/slide21.xml><?xml version="1.0" encoding="utf-8"?>
-<p:sld xmlns:a="http://schemas.openxmlformats.org/drawingml/2006/main" xmlns:r="http://schemas.openxmlformats.org/officeDocument/2006/relationships" xmlns:p="http://schemas.openxmlformats.org/presentationml/2006/main">
-  <p:cSld>
-    <p:spTree>
-      <p:nvGrpSpPr>
-        <p:cNvPr id="1" name=""/>
-        <p:cNvGrpSpPr/>
-        <p:nvPr/>
-      </p:nvGrpSpPr>
-      <p:grpSpPr>
-        <a:xfrm>
-          <a:off x="0" y="0"/>
-          <a:ext cx="0" cy="0"/>
-          <a:chOff x="0" y="0"/>
-          <a:chExt cx="0" cy="0"/>
-        </a:xfrm>
-      </p:grpSpPr>
-      <p:sp>
-        <p:nvSpPr>
-          <p:cNvPr id="2" name="제목 1"/>
-          <p:cNvSpPr>
-            <a:spLocks noGrp="1"/>
-          </p:cNvSpPr>
-          <p:nvPr>
-            <p:ph type="title"/>
-          </p:nvPr>
-        </p:nvSpPr>
-        <p:spPr/>
-        <p:txBody>
-          <a:bodyPr/>
-          <a:lstStyle/>
-          <a:p>
-            <a:r>
-              <a:rPr lang="en-US" altLang="ko-KR" dirty="0"/>
-              <a:t>CMOS NAND </a:t>
-            </a:r>
-            <a:r>
-              <a:rPr lang="ko-KR" altLang="en-US" dirty="0"/>
-              <a:t>게이트의 회로도</a:t>
-            </a:r>
-          </a:p>
-        </p:txBody>
-      </p:sp>
-      <p:sp>
-        <p:nvSpPr>
-          <p:cNvPr id="3" name="내용 개체 틀 2"/>
-          <p:cNvSpPr>
-            <a:spLocks noGrp="1"/>
-          </p:cNvSpPr>
-          <p:nvPr>
-            <p:ph idx="1"/>
-          </p:nvPr>
-        </p:nvSpPr>
-        <p:spPr/>
-        <p:txBody>
-          <a:bodyPr/>
-          <a:lstStyle/>
-          <a:p>
-            <a:r>
-              <a:rPr lang="en-US" altLang="ko-KR" dirty="0"/>
-              <a:t>B=0 </a:t>
-            </a:r>
-            <a:r>
-              <a:rPr lang="ko-KR" altLang="en-US" dirty="0"/>
-              <a:t>→ </a:t>
-            </a:r>
-            <a:r>
-              <a:rPr lang="en-US" altLang="ko-KR" dirty="0"/>
-              <a:t>PASS TR </a:t>
-            </a:r>
-            <a:r>
-              <a:rPr lang="ko-KR" altLang="en-US" dirty="0"/>
-              <a:t>활성화 →</a:t>
-            </a:r>
-            <a:r>
-              <a:rPr lang="en-US" altLang="ko-KR" dirty="0"/>
-              <a:t>A</a:t>
-            </a:r>
-            <a:r>
-              <a:rPr lang="ko-KR" altLang="en-US" dirty="0"/>
-              <a:t>에 의해서 결정</a:t>
-            </a:r>
-            <a:endParaRPr lang="en-US" altLang="ko-KR" dirty="0"/>
-          </a:p>
-          <a:p>
-            <a:r>
-              <a:rPr lang="en-US" altLang="ko-KR" dirty="0"/>
-              <a:t>B=1 </a:t>
-            </a:r>
-            <a:r>
-              <a:rPr lang="ko-KR" altLang="en-US" dirty="0"/>
-              <a:t>→ </a:t>
-            </a:r>
-            <a:r>
-              <a:rPr lang="ko-KR" altLang="en-US" dirty="0" err="1"/>
-              <a:t>앞단</a:t>
-            </a:r>
-            <a:r>
-              <a:rPr lang="ko-KR" altLang="en-US" dirty="0"/>
-              <a:t> </a:t>
-            </a:r>
-            <a:r>
-              <a:rPr lang="en-US" altLang="ko-KR" dirty="0"/>
-              <a:t>NOT </a:t>
-            </a:r>
-            <a:r>
-              <a:rPr lang="ko-KR" altLang="en-US" dirty="0"/>
-              <a:t>활성화 → </a:t>
-            </a:r>
-            <a:r>
-              <a:rPr lang="en-US" altLang="ko-KR" dirty="0"/>
-              <a:t>NOT</a:t>
-            </a:r>
-            <a:r>
-              <a:rPr lang="ko-KR" altLang="en-US" dirty="0"/>
-              <a:t>의 결과에 의해 결정</a:t>
-            </a:r>
-          </a:p>
-        </p:txBody>
-      </p:sp>
-      <p:pic>
-        <p:nvPicPr>
-          <p:cNvPr id="4" name="그림 3"/>
-          <p:cNvPicPr>
-            <a:picLocks noChangeAspect="1"/>
-          </p:cNvPicPr>
-          <p:nvPr/>
-        </p:nvPicPr>
-        <p:blipFill>
-          <a:blip r:embed="rId2"/>
-          <a:stretch>
-            <a:fillRect/>
-          </a:stretch>
-        </p:blipFill>
-        <p:spPr>
-          <a:xfrm>
-            <a:off x="838199" y="2790825"/>
-            <a:ext cx="5991225" cy="2929542"/>
-          </a:xfrm>
-          <a:prstGeom prst="rect">
-            <a:avLst/>
-          </a:prstGeom>
-        </p:spPr>
-      </p:pic>
-    </p:spTree>
-    <p:extLst>
-      <p:ext uri="{BB962C8B-B14F-4D97-AF65-F5344CB8AC3E}">
-        <p14:creationId xmlns:p14="http://schemas.microsoft.com/office/powerpoint/2010/main" val="3823095647"/>
-      </p:ext>
-    </p:extLst>
-  </p:cSld>
-  <p:clrMapOvr>
-    <a:masterClrMapping/>
-  </p:clrMapOvr>
-</p:sld>
-</file>
-
-<file path=ppt/slides/slide22.xml><?xml version="1.0" encoding="utf-8"?>
-<p:sld xmlns:a="http://schemas.openxmlformats.org/drawingml/2006/main" xmlns:r="http://schemas.openxmlformats.org/officeDocument/2006/relationships" xmlns:p="http://schemas.openxmlformats.org/presentationml/2006/main">
-  <p:cSld>
-    <p:spTree>
-      <p:nvGrpSpPr>
-        <p:cNvPr id="1" name=""/>
-        <p:cNvGrpSpPr/>
-        <p:nvPr/>
-      </p:nvGrpSpPr>
-      <p:grpSpPr>
-        <a:xfrm>
-          <a:off x="0" y="0"/>
-          <a:ext cx="0" cy="0"/>
-          <a:chOff x="0" y="0"/>
-          <a:chExt cx="0" cy="0"/>
-        </a:xfrm>
-      </p:grpSpPr>
-      <p:sp>
-        <p:nvSpPr>
-          <p:cNvPr id="2" name="제목 1"/>
-          <p:cNvSpPr>
-            <a:spLocks noGrp="1"/>
-          </p:cNvSpPr>
-          <p:nvPr>
-            <p:ph type="title"/>
-          </p:nvPr>
-        </p:nvSpPr>
-        <p:spPr/>
-        <p:txBody>
-          <a:bodyPr/>
-          <a:lstStyle/>
-          <a:p>
-            <a:r>
-              <a:rPr lang="en-US" altLang="ko-KR" dirty="0"/>
-              <a:t>CMOS XOR </a:t>
-            </a:r>
-            <a:r>
-              <a:rPr lang="ko-KR" altLang="en-US" dirty="0"/>
-              <a:t>게이트의 회로도</a:t>
-            </a:r>
-          </a:p>
-        </p:txBody>
-      </p:sp>
-      <p:pic>
-        <p:nvPicPr>
-          <p:cNvPr id="4" name="내용 개체 틀 3"/>
-          <p:cNvPicPr>
-            <a:picLocks noGrp="1" noChangeAspect="1"/>
-          </p:cNvPicPr>
-          <p:nvPr>
-            <p:ph idx="1"/>
-          </p:nvPr>
-        </p:nvPicPr>
-        <p:blipFill>
-          <a:blip r:embed="rId2"/>
-          <a:stretch>
-            <a:fillRect/>
-          </a:stretch>
-        </p:blipFill>
-        <p:spPr>
-          <a:xfrm>
-            <a:off x="838200" y="2025650"/>
-            <a:ext cx="10515600" cy="4351338"/>
-          </a:xfrm>
-          <a:prstGeom prst="rect">
-            <a:avLst/>
-          </a:prstGeom>
-        </p:spPr>
-      </p:pic>
-    </p:spTree>
-    <p:extLst>
-      <p:ext uri="{BB962C8B-B14F-4D97-AF65-F5344CB8AC3E}">
-        <p14:creationId xmlns:p14="http://schemas.microsoft.com/office/powerpoint/2010/main" val="802015981"/>
       </p:ext>
     </p:extLst>
   </p:cSld>

--- a/VLSI design 설계 실습/2025-05-28.pptx
+++ b/VLSI design 설계 실습/2025-05-28.pptx
@@ -22,8 +22,6 @@
     <p:sldId id="270" r:id="rId16"/>
     <p:sldId id="280" r:id="rId17"/>
     <p:sldId id="271" r:id="rId18"/>
-    <p:sldId id="273" r:id="rId19"/>
-    <p:sldId id="275" r:id="rId20"/>
   </p:sldIdLst>
   <p:sldSz cx="12192000" cy="6858000"/>
   <p:notesSz cx="6858000" cy="9144000"/>
@@ -259,7 +257,7 @@
           <a:p>
             <a:fld id="{14979939-5C65-4792-9B4E-BE39A3E42977}" type="datetimeFigureOut">
               <a:rPr lang="ko-KR" altLang="en-US" smtClean="0"/>
-              <a:t>2025-06-16</a:t>
+              <a:t>2025-06-17</a:t>
             </a:fld>
             <a:endParaRPr lang="ko-KR" altLang="en-US"/>
           </a:p>
@@ -427,7 +425,7 @@
           <a:p>
             <a:fld id="{14979939-5C65-4792-9B4E-BE39A3E42977}" type="datetimeFigureOut">
               <a:rPr lang="ko-KR" altLang="en-US" smtClean="0"/>
-              <a:t>2025-06-16</a:t>
+              <a:t>2025-06-17</a:t>
             </a:fld>
             <a:endParaRPr lang="ko-KR" altLang="en-US"/>
           </a:p>
@@ -605,7 +603,7 @@
           <a:p>
             <a:fld id="{14979939-5C65-4792-9B4E-BE39A3E42977}" type="datetimeFigureOut">
               <a:rPr lang="ko-KR" altLang="en-US" smtClean="0"/>
-              <a:t>2025-06-16</a:t>
+              <a:t>2025-06-17</a:t>
             </a:fld>
             <a:endParaRPr lang="ko-KR" altLang="en-US"/>
           </a:p>
@@ -773,7 +771,7 @@
           <a:p>
             <a:fld id="{14979939-5C65-4792-9B4E-BE39A3E42977}" type="datetimeFigureOut">
               <a:rPr lang="ko-KR" altLang="en-US" smtClean="0"/>
-              <a:t>2025-06-16</a:t>
+              <a:t>2025-06-17</a:t>
             </a:fld>
             <a:endParaRPr lang="ko-KR" altLang="en-US"/>
           </a:p>
@@ -1018,7 +1016,7 @@
           <a:p>
             <a:fld id="{14979939-5C65-4792-9B4E-BE39A3E42977}" type="datetimeFigureOut">
               <a:rPr lang="ko-KR" altLang="en-US" smtClean="0"/>
-              <a:t>2025-06-16</a:t>
+              <a:t>2025-06-17</a:t>
             </a:fld>
             <a:endParaRPr lang="ko-KR" altLang="en-US"/>
           </a:p>
@@ -1247,7 +1245,7 @@
           <a:p>
             <a:fld id="{14979939-5C65-4792-9B4E-BE39A3E42977}" type="datetimeFigureOut">
               <a:rPr lang="ko-KR" altLang="en-US" smtClean="0"/>
-              <a:t>2025-06-16</a:t>
+              <a:t>2025-06-17</a:t>
             </a:fld>
             <a:endParaRPr lang="ko-KR" altLang="en-US"/>
           </a:p>
@@ -1611,7 +1609,7 @@
           <a:p>
             <a:fld id="{14979939-5C65-4792-9B4E-BE39A3E42977}" type="datetimeFigureOut">
               <a:rPr lang="ko-KR" altLang="en-US" smtClean="0"/>
-              <a:t>2025-06-16</a:t>
+              <a:t>2025-06-17</a:t>
             </a:fld>
             <a:endParaRPr lang="ko-KR" altLang="en-US"/>
           </a:p>
@@ -1728,7 +1726,7 @@
           <a:p>
             <a:fld id="{14979939-5C65-4792-9B4E-BE39A3E42977}" type="datetimeFigureOut">
               <a:rPr lang="ko-KR" altLang="en-US" smtClean="0"/>
-              <a:t>2025-06-16</a:t>
+              <a:t>2025-06-17</a:t>
             </a:fld>
             <a:endParaRPr lang="ko-KR" altLang="en-US"/>
           </a:p>
@@ -1823,7 +1821,7 @@
           <a:p>
             <a:fld id="{14979939-5C65-4792-9B4E-BE39A3E42977}" type="datetimeFigureOut">
               <a:rPr lang="ko-KR" altLang="en-US" smtClean="0"/>
-              <a:t>2025-06-16</a:t>
+              <a:t>2025-06-17</a:t>
             </a:fld>
             <a:endParaRPr lang="ko-KR" altLang="en-US"/>
           </a:p>
@@ -2098,7 +2096,7 @@
           <a:p>
             <a:fld id="{14979939-5C65-4792-9B4E-BE39A3E42977}" type="datetimeFigureOut">
               <a:rPr lang="ko-KR" altLang="en-US" smtClean="0"/>
-              <a:t>2025-06-16</a:t>
+              <a:t>2025-06-17</a:t>
             </a:fld>
             <a:endParaRPr lang="ko-KR" altLang="en-US"/>
           </a:p>
@@ -2350,7 +2348,7 @@
           <a:p>
             <a:fld id="{14979939-5C65-4792-9B4E-BE39A3E42977}" type="datetimeFigureOut">
               <a:rPr lang="ko-KR" altLang="en-US" smtClean="0"/>
-              <a:t>2025-06-16</a:t>
+              <a:t>2025-06-17</a:t>
             </a:fld>
             <a:endParaRPr lang="ko-KR" altLang="en-US"/>
           </a:p>
@@ -2567,7 +2565,7 @@
           <a:p>
             <a:fld id="{14979939-5C65-4792-9B4E-BE39A3E42977}" type="datetimeFigureOut">
               <a:rPr lang="ko-KR" altLang="en-US" smtClean="0"/>
-              <a:t>2025-06-16</a:t>
+              <a:t>2025-06-17</a:t>
             </a:fld>
             <a:endParaRPr lang="ko-KR" altLang="en-US"/>
           </a:p>
@@ -3754,156 +3752,6 @@
   <p:clrMapOvr>
     <a:masterClrMapping/>
   </p:clrMapOvr>
-</p:sld>
-</file>
-
-<file path=ppt/slides/slide18.xml><?xml version="1.0" encoding="utf-8"?>
-<p:sld xmlns:a="http://schemas.openxmlformats.org/drawingml/2006/main" xmlns:r="http://schemas.openxmlformats.org/officeDocument/2006/relationships" xmlns:p="http://schemas.openxmlformats.org/presentationml/2006/main">
-  <p:cSld>
-    <p:spTree>
-      <p:nvGrpSpPr>
-        <p:cNvPr id="1" name=""/>
-        <p:cNvGrpSpPr/>
-        <p:nvPr/>
-      </p:nvGrpSpPr>
-      <p:grpSpPr>
-        <a:xfrm>
-          <a:off x="0" y="0"/>
-          <a:ext cx="0" cy="0"/>
-          <a:chOff x="0" y="0"/>
-          <a:chExt cx="0" cy="0"/>
-        </a:xfrm>
-      </p:grpSpPr>
-      <p:sp>
-        <p:nvSpPr>
-          <p:cNvPr id="2" name="제목 1"/>
-          <p:cNvSpPr>
-            <a:spLocks noGrp="1"/>
-          </p:cNvSpPr>
-          <p:nvPr>
-            <p:ph type="title"/>
-          </p:nvPr>
-        </p:nvSpPr>
-        <p:spPr/>
-        <p:txBody>
-          <a:bodyPr/>
-          <a:lstStyle/>
-          <a:p>
-            <a:endParaRPr lang="ko-KR" altLang="en-US"/>
-          </a:p>
-        </p:txBody>
-      </p:sp>
-      <p:pic>
-        <p:nvPicPr>
-          <p:cNvPr id="4" name="내용 개체 틀 3"/>
-          <p:cNvPicPr>
-            <a:picLocks noGrp="1" noChangeAspect="1"/>
-          </p:cNvPicPr>
-          <p:nvPr>
-            <p:ph idx="1"/>
-          </p:nvPr>
-        </p:nvPicPr>
-        <p:blipFill>
-          <a:blip r:embed="rId2"/>
-          <a:stretch>
-            <a:fillRect/>
-          </a:stretch>
-        </p:blipFill>
-        <p:spPr>
-          <a:xfrm>
-            <a:off x="838200" y="1872120"/>
-            <a:ext cx="10515600" cy="4351338"/>
-          </a:xfrm>
-          <a:prstGeom prst="rect">
-            <a:avLst/>
-          </a:prstGeom>
-        </p:spPr>
-      </p:pic>
-    </p:spTree>
-    <p:extLst>
-      <p:ext uri="{BB962C8B-B14F-4D97-AF65-F5344CB8AC3E}">
-        <p14:creationId xmlns:p14="http://schemas.microsoft.com/office/powerpoint/2010/main" val="904728716"/>
-      </p:ext>
-    </p:extLst>
-  </p:cSld>
-  <p:clrMapOvr>
-    <a:masterClrMapping/>
-  </p:clrMapOvr>
-</p:sld>
-</file>
-
-<file path=ppt/slides/slide19.xml><?xml version="1.0" encoding="utf-8"?>
-<p:sld xmlns:a="http://schemas.openxmlformats.org/drawingml/2006/main" xmlns:r="http://schemas.openxmlformats.org/officeDocument/2006/relationships" xmlns:p="http://schemas.openxmlformats.org/presentationml/2006/main">
-  <p:cSld>
-    <p:spTree>
-      <p:nvGrpSpPr>
-        <p:cNvPr id="1" name=""/>
-        <p:cNvGrpSpPr/>
-        <p:nvPr/>
-      </p:nvGrpSpPr>
-      <p:grpSpPr>
-        <a:xfrm>
-          <a:off x="0" y="0"/>
-          <a:ext cx="0" cy="0"/>
-          <a:chOff x="0" y="0"/>
-          <a:chExt cx="0" cy="0"/>
-        </a:xfrm>
-      </p:grpSpPr>
-      <p:sp>
-        <p:nvSpPr>
-          <p:cNvPr id="2" name="제목 1"/>
-          <p:cNvSpPr>
-            <a:spLocks noGrp="1"/>
-          </p:cNvSpPr>
-          <p:nvPr>
-            <p:ph type="title"/>
-          </p:nvPr>
-        </p:nvSpPr>
-        <p:spPr/>
-        <p:txBody>
-          <a:bodyPr/>
-          <a:lstStyle/>
-          <a:p>
-            <a:endParaRPr lang="ko-KR" altLang="en-US"/>
-          </a:p>
-        </p:txBody>
-      </p:sp>
-      <p:pic>
-        <p:nvPicPr>
-          <p:cNvPr id="4" name="내용 개체 틀 3"/>
-          <p:cNvPicPr>
-            <a:picLocks noGrp="1" noChangeAspect="1"/>
-          </p:cNvPicPr>
-          <p:nvPr>
-            <p:ph idx="1"/>
-          </p:nvPr>
-        </p:nvPicPr>
-        <p:blipFill>
-          <a:blip r:embed="rId2"/>
-          <a:stretch>
-            <a:fillRect/>
-          </a:stretch>
-        </p:blipFill>
-        <p:spPr>
-          <a:xfrm>
-            <a:off x="838199" y="1884348"/>
-            <a:ext cx="10515601" cy="4351338"/>
-          </a:xfrm>
-          <a:prstGeom prst="rect">
-            <a:avLst/>
-          </a:prstGeom>
-        </p:spPr>
-      </p:pic>
-    </p:spTree>
-    <p:extLst>
-      <p:ext uri="{BB962C8B-B14F-4D97-AF65-F5344CB8AC3E}">
-        <p14:creationId xmlns:p14="http://schemas.microsoft.com/office/powerpoint/2010/main" val="2151412638"/>
-      </p:ext>
-    </p:extLst>
-  </p:cSld>
-  <p:clrMapOvr>
-    <a:masterClrMapping/>
-  </p:clrMapOvr>
   <p:timing>
     <p:tnLst>
       <p:par>

--- a/VLSI design 설계 실습/2025-05-28.pptx
+++ b/VLSI design 설계 실습/2025-05-28.pptx
@@ -3305,26 +3305,52 @@
             </a:r>
             <a:r>
               <a:rPr lang="ko-KR" altLang="en-US" sz="2400" dirty="0"/>
-              <a:t>마스터</a:t>
+              <a:t>바이어스의 저항 및 전압을 조정하거나</a:t>
             </a:r>
             <a:r>
               <a:rPr lang="en-US" altLang="ko-KR" sz="2400" dirty="0"/>
-              <a:t>-</a:t>
+              <a:t>, </a:t>
+            </a:r>
+            <a:r>
+              <a:rPr lang="ko-KR" altLang="en-US" sz="2400" dirty="0"/>
+              <a:t>신호 조정</a:t>
+            </a:r>
+            <a:r>
+              <a:rPr lang="en-US" altLang="ko-KR" sz="2400" dirty="0"/>
+              <a:t>, </a:t>
+            </a:r>
+            <a:r>
+              <a:rPr lang="ko-KR" altLang="en-US" sz="2400" dirty="0"/>
+              <a:t>버퍼를 사용할 수 있다</a:t>
+            </a:r>
+            <a:r>
+              <a:rPr lang="en-US" altLang="ko-KR" sz="2400" dirty="0"/>
+              <a:t>. </a:t>
+            </a:r>
+            <a:r>
+              <a:rPr lang="ko-KR" altLang="en-US" sz="2400" dirty="0"/>
+              <a:t>혹은</a:t>
+            </a:r>
+            <a:r>
+              <a:rPr lang="en-US" altLang="ko-KR" sz="2400" dirty="0"/>
+              <a:t>, </a:t>
+            </a:r>
+            <a:r>
+              <a:rPr lang="ko-KR" altLang="en-US" sz="2400" dirty="0"/>
+              <a:t>다이오드를 추가하거나 </a:t>
             </a:r>
             <a:r>
               <a:rPr lang="ko-KR" altLang="en-US" sz="2400" dirty="0" err="1"/>
-              <a:t>슬레이브</a:t>
+              <a:t>커패시턴스를</a:t>
             </a:r>
             <a:r>
               <a:rPr lang="ko-KR" altLang="en-US" sz="2400" dirty="0"/>
-              <a:t> 방식으로 개선된 구조를 사용하거나 버퍼를 삽입하거나 트랜지스터의 크기를 조정해야 한다</a:t>
-            </a:r>
-            <a:r>
-              <a:rPr lang="en-US" altLang="ko-KR" sz="2400"/>
+              <a:t> 축소하는 방법이 있다</a:t>
+            </a:r>
+            <a:r>
+              <a:rPr lang="en-US" altLang="ko-KR" sz="2400" dirty="0"/>
               <a:t>.</a:t>
             </a:r>
-          </a:p>
-          <a:p>
             <a:endParaRPr lang="ko-KR" altLang="en-US" sz="2400" dirty="0"/>
           </a:p>
         </p:txBody>
@@ -3633,10 +3659,9 @@
           <a:lstStyle/>
           <a:p>
             <a:r>
-              <a:rPr lang="ko-KR" altLang="en-US" dirty="0" smtClean="0"/>
+              <a:rPr lang="ko-KR" altLang="en-US" dirty="0"/>
               <a:t>동기 방식과 비동기 방식의 차이점</a:t>
             </a:r>
-            <a:endParaRPr lang="ko-KR" altLang="en-US" dirty="0"/>
           </a:p>
         </p:txBody>
       </p:sp>
@@ -3752,13 +3777,6 @@
   <p:clrMapOvr>
     <a:masterClrMapping/>
   </p:clrMapOvr>
-  <p:timing>
-    <p:tnLst>
-      <p:par>
-        <p:cTn id="1" dur="indefinite" restart="never" nodeType="tmRoot"/>
-      </p:par>
-    </p:tnLst>
-  </p:timing>
 </p:sld>
 </file>
 
